--- a/outputs/produkte/mama-ceo/03-praesentationen/saeule-4/02-lektion-4-2.pptx
+++ b/outputs/produkte/mama-ceo/03-praesentationen/saeule-4/02-lektion-4-2.pptx
@@ -4140,6 +4140,14 @@
 <file path=ppt/slides/slide1.xml><?xml version="1.0" encoding="utf-8"?>
 <p:sld xmlns:a="http://schemas.openxmlformats.org/drawingml/2006/main" xmlns:p="http://schemas.openxmlformats.org/presentationml/2006/main" xmlns:r="http://schemas.openxmlformats.org/officeDocument/2006/relationships">
   <p:cSld>
+    <p:bg>
+      <p:bgPr>
+        <a:solidFill>
+          <a:srgbClr val="F1ECDD"/>
+        </a:solidFill>
+        <a:effectLst/>
+      </p:bgPr>
+    </p:bg>
     <p:spTree>
       <p:nvGrpSpPr>
         <p:cNvPr id="1" name=""/>
@@ -4415,6 +4423,14 @@
 <file path=ppt/slides/slide10.xml><?xml version="1.0" encoding="utf-8"?>
 <p:sld xmlns:a="http://schemas.openxmlformats.org/drawingml/2006/main" xmlns:p="http://schemas.openxmlformats.org/presentationml/2006/main" xmlns:r="http://schemas.openxmlformats.org/officeDocument/2006/relationships">
   <p:cSld>
+    <p:bg>
+      <p:bgPr>
+        <a:solidFill>
+          <a:srgbClr val="F1ECDD"/>
+        </a:solidFill>
+        <a:effectLst/>
+      </p:bgPr>
+    </p:bg>
     <p:spTree>
       <p:nvGrpSpPr>
         <p:cNvPr id="1" name=""/>
@@ -4490,7 +4506,7 @@
                 </a:solidFill>
                 <a:latin typeface="Calibri"/>
               </a:rPr>
-              <a:t>▸  </a:t>
+              <a:t>✓  </a:t>
             </a:r>
             <a:r>
               <a:rPr sz="1600" b="0">
@@ -4515,7 +4531,7 @@
                 </a:solidFill>
                 <a:latin typeface="Calibri"/>
               </a:rPr>
-              <a:t>▸  </a:t>
+              <a:t>✓  </a:t>
             </a:r>
             <a:r>
               <a:rPr sz="1600" b="0">
@@ -4609,6 +4625,14 @@
 <file path=ppt/slides/slide2.xml><?xml version="1.0" encoding="utf-8"?>
 <p:sld xmlns:a="http://schemas.openxmlformats.org/drawingml/2006/main" xmlns:p="http://schemas.openxmlformats.org/presentationml/2006/main" xmlns:r="http://schemas.openxmlformats.org/officeDocument/2006/relationships">
   <p:cSld>
+    <p:bg>
+      <p:bgPr>
+        <a:solidFill>
+          <a:srgbClr val="F1ECDD"/>
+        </a:solidFill>
+        <a:effectLst/>
+      </p:bgPr>
+    </p:bg>
     <p:spTree>
       <p:nvGrpSpPr>
         <p:cNvPr id="1" name=""/>
@@ -4684,7 +4708,7 @@
                 </a:solidFill>
                 <a:latin typeface="Calibri"/>
               </a:rPr>
-              <a:t>▸  </a:t>
+              <a:t>✓  </a:t>
             </a:r>
             <a:r>
               <a:rPr sz="1600" b="0">
@@ -4709,7 +4733,7 @@
                 </a:solidFill>
                 <a:latin typeface="Calibri"/>
               </a:rPr>
-              <a:t>▸  </a:t>
+              <a:t>✓  </a:t>
             </a:r>
             <a:r>
               <a:rPr sz="1600" b="0">
@@ -4734,7 +4758,7 @@
                 </a:solidFill>
                 <a:latin typeface="Calibri"/>
               </a:rPr>
-              <a:t>▸  </a:t>
+              <a:t>✓  </a:t>
             </a:r>
             <a:r>
               <a:rPr sz="1600" b="0">
@@ -4828,6 +4852,14 @@
 <file path=ppt/slides/slide3.xml><?xml version="1.0" encoding="utf-8"?>
 <p:sld xmlns:a="http://schemas.openxmlformats.org/drawingml/2006/main" xmlns:p="http://schemas.openxmlformats.org/presentationml/2006/main" xmlns:r="http://schemas.openxmlformats.org/officeDocument/2006/relationships">
   <p:cSld>
+    <p:bg>
+      <p:bgPr>
+        <a:solidFill>
+          <a:srgbClr val="F1ECDD"/>
+        </a:solidFill>
+        <a:effectLst/>
+      </p:bgPr>
+    </p:bg>
     <p:spTree>
       <p:nvGrpSpPr>
         <p:cNvPr id="1" name=""/>
@@ -4903,7 +4935,7 @@
                 </a:solidFill>
                 <a:latin typeface="Calibri"/>
               </a:rPr>
-              <a:t>▸  </a:t>
+              <a:t>✓  </a:t>
             </a:r>
             <a:r>
               <a:rPr sz="1600" b="0">
@@ -4928,7 +4960,7 @@
                 </a:solidFill>
                 <a:latin typeface="Calibri"/>
               </a:rPr>
-              <a:t>▸  </a:t>
+              <a:t>✓  </a:t>
             </a:r>
             <a:r>
               <a:rPr sz="1600" b="0">
@@ -4953,7 +4985,7 @@
                 </a:solidFill>
                 <a:latin typeface="Calibri"/>
               </a:rPr>
-              <a:t>▸  </a:t>
+              <a:t>✓  </a:t>
             </a:r>
             <a:r>
               <a:rPr sz="1600" b="0">
@@ -5047,6 +5079,14 @@
 <file path=ppt/slides/slide4.xml><?xml version="1.0" encoding="utf-8"?>
 <p:sld xmlns:a="http://schemas.openxmlformats.org/drawingml/2006/main" xmlns:p="http://schemas.openxmlformats.org/presentationml/2006/main" xmlns:r="http://schemas.openxmlformats.org/officeDocument/2006/relationships">
   <p:cSld>
+    <p:bg>
+      <p:bgPr>
+        <a:solidFill>
+          <a:srgbClr val="F1ECDD"/>
+        </a:solidFill>
+        <a:effectLst/>
+      </p:bgPr>
+    </p:bg>
     <p:spTree>
       <p:nvGrpSpPr>
         <p:cNvPr id="1" name=""/>
@@ -5122,7 +5162,7 @@
                 </a:solidFill>
                 <a:latin typeface="Calibri"/>
               </a:rPr>
-              <a:t>▸  </a:t>
+              <a:t>✓  </a:t>
             </a:r>
             <a:r>
               <a:rPr sz="1600" b="0">
@@ -5147,7 +5187,7 @@
                 </a:solidFill>
                 <a:latin typeface="Calibri"/>
               </a:rPr>
-              <a:t>▸  </a:t>
+              <a:t>✓  </a:t>
             </a:r>
             <a:r>
               <a:rPr sz="1600" b="0">
@@ -5172,7 +5212,7 @@
                 </a:solidFill>
                 <a:latin typeface="Calibri"/>
               </a:rPr>
-              <a:t>▸  </a:t>
+              <a:t>✓  </a:t>
             </a:r>
             <a:r>
               <a:rPr sz="1600" b="0">
@@ -5266,6 +5306,14 @@
 <file path=ppt/slides/slide5.xml><?xml version="1.0" encoding="utf-8"?>
 <p:sld xmlns:a="http://schemas.openxmlformats.org/drawingml/2006/main" xmlns:p="http://schemas.openxmlformats.org/presentationml/2006/main" xmlns:r="http://schemas.openxmlformats.org/officeDocument/2006/relationships">
   <p:cSld>
+    <p:bg>
+      <p:bgPr>
+        <a:solidFill>
+          <a:srgbClr val="F1ECDD"/>
+        </a:solidFill>
+        <a:effectLst/>
+      </p:bgPr>
+    </p:bg>
     <p:spTree>
       <p:nvGrpSpPr>
         <p:cNvPr id="1" name=""/>
@@ -5341,7 +5389,7 @@
                 </a:solidFill>
                 <a:latin typeface="Calibri"/>
               </a:rPr>
-              <a:t>▸  </a:t>
+              <a:t>✓  </a:t>
             </a:r>
             <a:r>
               <a:rPr sz="1600" b="0">
@@ -5366,7 +5414,7 @@
                 </a:solidFill>
                 <a:latin typeface="Calibri"/>
               </a:rPr>
-              <a:t>▸  </a:t>
+              <a:t>✓  </a:t>
             </a:r>
             <a:r>
               <a:rPr sz="1600" b="0">
@@ -5391,7 +5439,7 @@
                 </a:solidFill>
                 <a:latin typeface="Calibri"/>
               </a:rPr>
-              <a:t>▸  </a:t>
+              <a:t>✓  </a:t>
             </a:r>
             <a:r>
               <a:rPr sz="1600" b="0">
@@ -5485,6 +5533,14 @@
 <file path=ppt/slides/slide6.xml><?xml version="1.0" encoding="utf-8"?>
 <p:sld xmlns:a="http://schemas.openxmlformats.org/drawingml/2006/main" xmlns:p="http://schemas.openxmlformats.org/presentationml/2006/main" xmlns:r="http://schemas.openxmlformats.org/officeDocument/2006/relationships">
   <p:cSld>
+    <p:bg>
+      <p:bgPr>
+        <a:solidFill>
+          <a:srgbClr val="F1ECDD"/>
+        </a:solidFill>
+        <a:effectLst/>
+      </p:bgPr>
+    </p:bg>
     <p:spTree>
       <p:nvGrpSpPr>
         <p:cNvPr id="1" name=""/>
@@ -5560,7 +5616,7 @@
                 </a:solidFill>
                 <a:latin typeface="Calibri"/>
               </a:rPr>
-              <a:t>▸  </a:t>
+              <a:t>✓  </a:t>
             </a:r>
             <a:r>
               <a:rPr sz="1600" b="0">
@@ -5585,7 +5641,7 @@
                 </a:solidFill>
                 <a:latin typeface="Calibri"/>
               </a:rPr>
-              <a:t>▸  </a:t>
+              <a:t>✓  </a:t>
             </a:r>
             <a:r>
               <a:rPr sz="1600" b="0">
@@ -5610,7 +5666,7 @@
                 </a:solidFill>
                 <a:latin typeface="Calibri"/>
               </a:rPr>
-              <a:t>▸  </a:t>
+              <a:t>✓  </a:t>
             </a:r>
             <a:r>
               <a:rPr sz="1600" b="0">
@@ -5704,6 +5760,14 @@
 <file path=ppt/slides/slide7.xml><?xml version="1.0" encoding="utf-8"?>
 <p:sld xmlns:a="http://schemas.openxmlformats.org/drawingml/2006/main" xmlns:p="http://schemas.openxmlformats.org/presentationml/2006/main" xmlns:r="http://schemas.openxmlformats.org/officeDocument/2006/relationships">
   <p:cSld>
+    <p:bg>
+      <p:bgPr>
+        <a:solidFill>
+          <a:srgbClr val="F1ECDD"/>
+        </a:solidFill>
+        <a:effectLst/>
+      </p:bgPr>
+    </p:bg>
     <p:spTree>
       <p:nvGrpSpPr>
         <p:cNvPr id="1" name=""/>
@@ -5779,7 +5843,7 @@
                 </a:solidFill>
                 <a:latin typeface="Calibri"/>
               </a:rPr>
-              <a:t>▸  </a:t>
+              <a:t>✓  </a:t>
             </a:r>
             <a:r>
               <a:rPr sz="1600" b="0">
@@ -5804,7 +5868,7 @@
                 </a:solidFill>
                 <a:latin typeface="Calibri"/>
               </a:rPr>
-              <a:t>▸  </a:t>
+              <a:t>✓  </a:t>
             </a:r>
             <a:r>
               <a:rPr sz="1600" b="0">
@@ -5829,7 +5893,7 @@
                 </a:solidFill>
                 <a:latin typeface="Calibri"/>
               </a:rPr>
-              <a:t>▸  </a:t>
+              <a:t>✓  </a:t>
             </a:r>
             <a:r>
               <a:rPr sz="1600" b="0">
@@ -5923,6 +5987,14 @@
 <file path=ppt/slides/slide8.xml><?xml version="1.0" encoding="utf-8"?>
 <p:sld xmlns:a="http://schemas.openxmlformats.org/drawingml/2006/main" xmlns:p="http://schemas.openxmlformats.org/presentationml/2006/main" xmlns:r="http://schemas.openxmlformats.org/officeDocument/2006/relationships">
   <p:cSld>
+    <p:bg>
+      <p:bgPr>
+        <a:solidFill>
+          <a:srgbClr val="F1ECDD"/>
+        </a:solidFill>
+        <a:effectLst/>
+      </p:bgPr>
+    </p:bg>
     <p:spTree>
       <p:nvGrpSpPr>
         <p:cNvPr id="1" name=""/>
@@ -5998,7 +6070,7 @@
                 </a:solidFill>
                 <a:latin typeface="Calibri"/>
               </a:rPr>
-              <a:t>▸  </a:t>
+              <a:t>✓  </a:t>
             </a:r>
             <a:r>
               <a:rPr sz="1600" b="0">
@@ -6023,7 +6095,7 @@
                 </a:solidFill>
                 <a:latin typeface="Calibri"/>
               </a:rPr>
-              <a:t>▸  </a:t>
+              <a:t>✓  </a:t>
             </a:r>
             <a:r>
               <a:rPr sz="1600" b="0">
@@ -6048,7 +6120,7 @@
                 </a:solidFill>
                 <a:latin typeface="Calibri"/>
               </a:rPr>
-              <a:t>▸  </a:t>
+              <a:t>✓  </a:t>
             </a:r>
             <a:r>
               <a:rPr sz="1600" b="0">
@@ -6142,6 +6214,14 @@
 <file path=ppt/slides/slide9.xml><?xml version="1.0" encoding="utf-8"?>
 <p:sld xmlns:a="http://schemas.openxmlformats.org/drawingml/2006/main" xmlns:p="http://schemas.openxmlformats.org/presentationml/2006/main" xmlns:r="http://schemas.openxmlformats.org/officeDocument/2006/relationships">
   <p:cSld>
+    <p:bg>
+      <p:bgPr>
+        <a:solidFill>
+          <a:srgbClr val="F1ECDD"/>
+        </a:solidFill>
+        <a:effectLst/>
+      </p:bgPr>
+    </p:bg>
     <p:spTree>
       <p:nvGrpSpPr>
         <p:cNvPr id="1" name=""/>
@@ -6217,7 +6297,7 @@
                 </a:solidFill>
                 <a:latin typeface="Calibri"/>
               </a:rPr>
-              <a:t>▸  </a:t>
+              <a:t>✓  </a:t>
             </a:r>
             <a:r>
               <a:rPr sz="1600" b="0">
@@ -6242,7 +6322,7 @@
                 </a:solidFill>
                 <a:latin typeface="Calibri"/>
               </a:rPr>
-              <a:t>▸  </a:t>
+              <a:t>✓  </a:t>
             </a:r>
             <a:r>
               <a:rPr sz="1600" b="0">
@@ -6267,7 +6347,7 @@
                 </a:solidFill>
                 <a:latin typeface="Calibri"/>
               </a:rPr>
-              <a:t>▸  </a:t>
+              <a:t>✓  </a:t>
             </a:r>
             <a:r>
               <a:rPr sz="1600" b="0">
